--- a/presentation/Vibe Coding in Codex-5.3.pptx
+++ b/presentation/Vibe Coding in Codex-5.3.pptx
@@ -25,7 +25,7 @@
   <p:notesSz cx="6858000" cy="9144000"/>
   <p:embeddedFontLst>
     <p:embeddedFont>
-      <p:font typeface="Inter" panose="02000503000000020004" pitchFamily="2" charset="0"/>
+      <p:font typeface="Inter" panose="02000503000000020004"/>
       <p:regular r:id="rId15"/>
       <p:bold r:id="rId16"/>
       <p:italic r:id="rId17"/>
@@ -13531,7 +13531,7 @@
         <p:spPr>
           <a:xfrm>
             <a:off x="2286000" y="3618607"/>
-            <a:ext cx="7620000" cy="1097012"/>
+            <a:ext cx="7620000" cy="2215991"/>
           </a:xfrm>
           <a:prstGeom prst="rect">
             <a:avLst/>
@@ -13560,7 +13560,7 @@
               <a:buNone/>
             </a:pPr>
             <a:r>
-              <a:rPr lang="en-US" sz="1800" b="0" i="0" u="none" strike="noStrike" cap="none">
+              <a:rPr lang="en-US" sz="1800" b="0" i="0" u="none" strike="noStrike" cap="none" dirty="0">
                 <a:solidFill>
                   <a:srgbClr val="94A3B8"/>
                 </a:solidFill>
@@ -13571,7 +13571,103 @@
               </a:rPr>
               <a:t>Moving from manual syntax management to high-level intention orchestration. In Codex-5.3, we don't just write code; we cultivate vibes.</a:t>
             </a:r>
-            <a:endParaRPr/>
+          </a:p>
+          <a:p>
+            <a:pPr marL="0" marR="0" lvl="0" indent="0" algn="ctr" rtl="0">
+              <a:lnSpc>
+                <a:spcPct val="159944"/>
+              </a:lnSpc>
+              <a:spcBef>
+                <a:spcPts val="0"/>
+              </a:spcBef>
+              <a:spcAft>
+                <a:spcPts val="0"/>
+              </a:spcAft>
+              <a:buNone/>
+            </a:pPr>
+            <a:endParaRPr lang="en-US" sz="1800" dirty="0">
+              <a:solidFill>
+                <a:srgbClr val="94A3B8"/>
+              </a:solidFill>
+              <a:latin typeface="Inter"/>
+              <a:sym typeface="Inter"/>
+            </a:endParaRPr>
+          </a:p>
+          <a:p>
+            <a:pPr lvl="0" algn="ctr">
+              <a:lnSpc>
+                <a:spcPct val="159944"/>
+              </a:lnSpc>
+            </a:pPr>
+            <a:r>
+              <a:rPr lang="en-GB" sz="1800" dirty="0">
+                <a:solidFill>
+                  <a:srgbClr val="94A3B8"/>
+                </a:solidFill>
+                <a:latin typeface="Inter"/>
+              </a:rPr>
+              <a:t>https://</a:t>
+            </a:r>
+            <a:r>
+              <a:rPr lang="en-GB" sz="1800" dirty="0" err="1">
+                <a:solidFill>
+                  <a:srgbClr val="94A3B8"/>
+                </a:solidFill>
+                <a:latin typeface="Inter"/>
+              </a:rPr>
+              <a:t>github.com</a:t>
+            </a:r>
+            <a:r>
+              <a:rPr lang="en-GB" sz="1800" dirty="0">
+                <a:solidFill>
+                  <a:srgbClr val="94A3B8"/>
+                </a:solidFill>
+                <a:latin typeface="Inter"/>
+              </a:rPr>
+              <a:t>/</a:t>
+            </a:r>
+            <a:r>
+              <a:rPr lang="en-GB" sz="1800" dirty="0" err="1">
+                <a:solidFill>
+                  <a:srgbClr val="94A3B8"/>
+                </a:solidFill>
+                <a:latin typeface="Inter"/>
+              </a:rPr>
+              <a:t>isaris</a:t>
+            </a:r>
+            <a:r>
+              <a:rPr lang="en-GB" sz="1800" dirty="0">
+                <a:solidFill>
+                  <a:srgbClr val="94A3B8"/>
+                </a:solidFill>
+                <a:latin typeface="Inter"/>
+              </a:rPr>
+              <a:t>-hub/</a:t>
+            </a:r>
+            <a:r>
+              <a:rPr lang="en-GB" sz="1800" dirty="0" err="1">
+                <a:solidFill>
+                  <a:srgbClr val="94A3B8"/>
+                </a:solidFill>
+                <a:latin typeface="Inter"/>
+              </a:rPr>
+              <a:t>sr</a:t>
+            </a:r>
+            <a:r>
+              <a:rPr lang="en-GB" sz="1800" dirty="0">
+                <a:solidFill>
+                  <a:srgbClr val="94A3B8"/>
+                </a:solidFill>
+                <a:latin typeface="Inter"/>
+              </a:rPr>
+              <a:t>-vibe-coding</a:t>
+            </a:r>
+            <a:endParaRPr sz="1800" dirty="0">
+              <a:solidFill>
+                <a:srgbClr val="94A3B8"/>
+              </a:solidFill>
+              <a:latin typeface="Inter"/>
+            </a:endParaRPr>
           </a:p>
         </p:txBody>
       </p:sp>
